--- a/ContributionsForDiscussions/onmi2026.RJ.001_ZR_modeling.pptx
+++ b/ContributionsForDiscussions/onmi2026.RJ.001_ZR_modeling.pptx
@@ -109,6 +109,11 @@
       </a:defRPr>
     </a:lvl9pPr>
   </p:defaultTextStyle>
+  <p:extLst>
+    <p:ext uri="{EFAFB233-063F-42B5-8137-9DF3F51BA10A}">
+      <p15:sldGuideLst xmlns:p15="http://schemas.microsoft.com/office/powerpoint/2012/main"/>
+    </p:ext>
+  </p:extLst>
 </p:presentation>
 </file>
 
@@ -125,7 +130,7 @@
   <pc:docChgLst>
     <pc:chgData name="Joyce, Roshan" userId="42de0764-d99f-4bc9-bb91-484b45138fac" providerId="ADAL" clId="{0B41308D-1E7A-4A1E-8051-7568DAC0FC05}"/>
     <pc:docChg chg="undo custSel addSld delSld modSld">
-      <pc:chgData name="Joyce, Roshan" userId="42de0764-d99f-4bc9-bb91-484b45138fac" providerId="ADAL" clId="{0B41308D-1E7A-4A1E-8051-7568DAC0FC05}" dt="2026-01-21T12:41:41.358" v="968" actId="20577"/>
+      <pc:chgData name="Joyce, Roshan" userId="42de0764-d99f-4bc9-bb91-484b45138fac" providerId="ADAL" clId="{0B41308D-1E7A-4A1E-8051-7568DAC0FC05}" dt="2026-01-22T02:59:09.838" v="1338" actId="20577"/>
       <pc:docMkLst>
         <pc:docMk/>
       </pc:docMkLst>
@@ -160,13 +165,13 @@
         </pc:sldMkLst>
       </pc:sldChg>
       <pc:sldChg chg="addSp modSp mod">
-        <pc:chgData name="Joyce, Roshan" userId="42de0764-d99f-4bc9-bb91-484b45138fac" providerId="ADAL" clId="{0B41308D-1E7A-4A1E-8051-7568DAC0FC05}" dt="2026-01-21T12:38:11.422" v="827" actId="207"/>
+        <pc:chgData name="Joyce, Roshan" userId="42de0764-d99f-4bc9-bb91-484b45138fac" providerId="ADAL" clId="{0B41308D-1E7A-4A1E-8051-7568DAC0FC05}" dt="2026-01-22T02:59:09.838" v="1338" actId="20577"/>
         <pc:sldMkLst>
           <pc:docMk/>
           <pc:sldMk cId="1797868651" sldId="2877"/>
         </pc:sldMkLst>
         <pc:spChg chg="add mod">
-          <ac:chgData name="Joyce, Roshan" userId="42de0764-d99f-4bc9-bb91-484b45138fac" providerId="ADAL" clId="{0B41308D-1E7A-4A1E-8051-7568DAC0FC05}" dt="2026-01-21T12:38:11.422" v="827" actId="207"/>
+          <ac:chgData name="Joyce, Roshan" userId="42de0764-d99f-4bc9-bb91-484b45138fac" providerId="ADAL" clId="{0B41308D-1E7A-4A1E-8051-7568DAC0FC05}" dt="2026-01-22T02:59:09.838" v="1338" actId="20577"/>
           <ac:spMkLst>
             <pc:docMk/>
             <pc:sldMk cId="1797868651" sldId="2877"/>
@@ -175,7 +180,7 @@
         </pc:spChg>
       </pc:sldChg>
       <pc:sldChg chg="addSp delSp modSp new mod modClrScheme chgLayout">
-        <pc:chgData name="Joyce, Roshan" userId="42de0764-d99f-4bc9-bb91-484b45138fac" providerId="ADAL" clId="{0B41308D-1E7A-4A1E-8051-7568DAC0FC05}" dt="2026-01-21T12:19:07.665" v="34" actId="20577"/>
+        <pc:chgData name="Joyce, Roshan" userId="42de0764-d99f-4bc9-bb91-484b45138fac" providerId="ADAL" clId="{0B41308D-1E7A-4A1E-8051-7568DAC0FC05}" dt="2026-01-22T02:53:01.630" v="997" actId="255"/>
         <pc:sldMkLst>
           <pc:docMk/>
           <pc:sldMk cId="2005947775" sldId="2879"/>
@@ -205,7 +210,7 @@
           </ac:spMkLst>
         </pc:spChg>
         <pc:spChg chg="add mod">
-          <ac:chgData name="Joyce, Roshan" userId="42de0764-d99f-4bc9-bb91-484b45138fac" providerId="ADAL" clId="{0B41308D-1E7A-4A1E-8051-7568DAC0FC05}" dt="2026-01-21T12:18:49.245" v="4" actId="27636"/>
+          <ac:chgData name="Joyce, Roshan" userId="42de0764-d99f-4bc9-bb91-484b45138fac" providerId="ADAL" clId="{0B41308D-1E7A-4A1E-8051-7568DAC0FC05}" dt="2026-01-22T02:53:01.630" v="997" actId="255"/>
           <ac:spMkLst>
             <pc:docMk/>
             <pc:sldMk cId="2005947775" sldId="2879"/>
@@ -214,7 +219,7 @@
         </pc:spChg>
       </pc:sldChg>
       <pc:sldChg chg="addSp delSp modSp new mod modClrScheme chgLayout">
-        <pc:chgData name="Joyce, Roshan" userId="42de0764-d99f-4bc9-bb91-484b45138fac" providerId="ADAL" clId="{0B41308D-1E7A-4A1E-8051-7568DAC0FC05}" dt="2026-01-21T12:41:41.358" v="968" actId="20577"/>
+        <pc:chgData name="Joyce, Roshan" userId="42de0764-d99f-4bc9-bb91-484b45138fac" providerId="ADAL" clId="{0B41308D-1E7A-4A1E-8051-7568DAC0FC05}" dt="2026-01-22T02:53:55.950" v="1068" actId="20577"/>
         <pc:sldMkLst>
           <pc:docMk/>
           <pc:sldMk cId="3117817325" sldId="2880"/>
@@ -268,7 +273,7 @@
           </ac:spMkLst>
         </pc:spChg>
         <pc:spChg chg="add mod">
-          <ac:chgData name="Joyce, Roshan" userId="42de0764-d99f-4bc9-bb91-484b45138fac" providerId="ADAL" clId="{0B41308D-1E7A-4A1E-8051-7568DAC0FC05}" dt="2026-01-21T12:41:41.358" v="968" actId="20577"/>
+          <ac:chgData name="Joyce, Roshan" userId="42de0764-d99f-4bc9-bb91-484b45138fac" providerId="ADAL" clId="{0B41308D-1E7A-4A1E-8051-7568DAC0FC05}" dt="2026-01-22T02:53:55.950" v="1068" actId="20577"/>
           <ac:spMkLst>
             <pc:docMk/>
             <pc:sldMk cId="3117817325" sldId="2880"/>
@@ -1101,7 +1106,7 @@
           <a:p>
             <a:fld id="{5567F3F1-5DA2-4699-856E-26E7AA5562C8}" type="datetimeFigureOut">
               <a:rPr lang="es-ES" smtClean="0"/>
-              <a:t>21/01/2026</a:t>
+              <a:t>22/01/2026</a:t>
             </a:fld>
             <a:endParaRPr lang="es-ES"/>
           </a:p>
@@ -4134,11 +4139,17 @@
         <p:spPr/>
         <p:txBody>
           <a:bodyPr>
-            <a:normAutofit fontScale="25000" lnSpcReduction="20000"/>
+            <a:noAutofit/>
           </a:bodyPr>
           <a:lstStyle/>
           <a:p>
-            <a:endParaRPr lang="en-IN"/>
+            <a:pPr marL="0" indent="0">
+              <a:buNone/>
+            </a:pPr>
+            <a:r>
+              <a:rPr lang="en-IN" sz="1800" dirty="0"/>
+              <a:t>Roshan Joyce, 1FINITY INC</a:t>
+            </a:r>
           </a:p>
         </p:txBody>
       </p:sp>
@@ -10211,7 +10222,7 @@
         <p:spPr>
           <a:xfrm>
             <a:off x="6806380" y="2875002"/>
-            <a:ext cx="2721077" cy="553998"/>
+            <a:ext cx="2721077" cy="1015663"/>
           </a:xfrm>
           <a:prstGeom prst="rect">
             <a:avLst/>
@@ -10231,6 +10242,23 @@
                 </a:solidFill>
               </a:rPr>
               <a:t>I remember there was a discussion about this with AM, ND, and RC and these diagrams were accepted in TR547 v3.3</a:t>
+            </a:r>
+          </a:p>
+          <a:p>
+            <a:endParaRPr lang="en-IN" sz="1000" dirty="0">
+              <a:solidFill>
+                <a:srgbClr val="C00000"/>
+              </a:solidFill>
+            </a:endParaRPr>
+          </a:p>
+          <a:p>
+            <a:r>
+              <a:rPr lang="en-IN" sz="1000" dirty="0">
+                <a:solidFill>
+                  <a:srgbClr val="C00000"/>
+                </a:solidFill>
+              </a:rPr>
+              <a:t>The circled portion would be applicable to ZR/ZR+ modelling in TAPI</a:t>
             </a:r>
           </a:p>
         </p:txBody>
@@ -21864,7 +21892,7 @@
         <p:spPr>
           <a:xfrm>
             <a:off x="5189725" y="4328652"/>
-            <a:ext cx="6195607" cy="1015663"/>
+            <a:ext cx="6195607" cy="1477328"/>
           </a:xfrm>
           <a:prstGeom prst="rect">
             <a:avLst/>
@@ -21952,7 +21980,35 @@
                   <a:srgbClr val="C00000"/>
                 </a:solidFill>
               </a:rPr>
+              <a:t>Can all relevant alarms and PMs be modelled against the OTSiMC CEP? Or, are there ZR/ZR+ specific alarms/PMs to be considered on the OTSiMCA CEP?</a:t>
+            </a:r>
+          </a:p>
+          <a:p>
+            <a:pPr marL="342900" indent="-342900">
+              <a:buFont typeface="+mj-lt"/>
+              <a:buAutoNum type="arabicPeriod"/>
+            </a:pPr>
+            <a:r>
+              <a:rPr lang="en-IN" sz="1000" dirty="0">
+                <a:solidFill>
+                  <a:srgbClr val="C00000"/>
+                </a:solidFill>
+              </a:rPr>
               <a:t>DSR does not define l-p-q for rates above 400G.</a:t>
+            </a:r>
+          </a:p>
+          <a:p>
+            <a:pPr marL="800100" lvl="1" indent="-342900">
+              <a:buFont typeface="+mj-lt"/>
+              <a:buAutoNum type="arabicPeriod"/>
+            </a:pPr>
+            <a:r>
+              <a:rPr lang="en-IN" sz="1000" dirty="0">
+                <a:solidFill>
+                  <a:srgbClr val="C00000"/>
+                </a:solidFill>
+              </a:rPr>
+              <a:t>I think it is better to add l-p-q identities for 500G to 1200G, 1600G, and 3200G</a:t>
             </a:r>
           </a:p>
         </p:txBody>
